--- a/experiments/mckinsey-layout-rules-luna-20260909/.runtime/starter-final.pptx
+++ b/experiments/mckinsey-layout-rules-luna-20260909/.runtime/starter-final.pptx
@@ -2,17 +2,17 @@
 <file path=ppt/presentation.xml><?xml version="1.0" encoding="utf-8"?>
 <p:presentation xmlns:p="http://schemas.openxmlformats.org/presentationml/2006/main">
   <p:sldMasterIdLst>
-    <p:sldMasterId xmlns:r="http://schemas.openxmlformats.org/officeDocument/2006/relationships" id="2147483648" r:id="R5ee1dd9003294e54"/>
-    <p:sldMasterId xmlns:r="http://schemas.openxmlformats.org/officeDocument/2006/relationships" id="2147483660" r:id="R3209acf6485945a8"/>
-    <p:sldMasterId xmlns:r="http://schemas.openxmlformats.org/officeDocument/2006/relationships" id="2147483663" r:id="Ra73c64579bd94128"/>
+    <p:sldMasterId xmlns:r="http://schemas.openxmlformats.org/officeDocument/2006/relationships" id="2147483648" r:id="R14ad75ffbda74f42"/>
+    <p:sldMasterId xmlns:r="http://schemas.openxmlformats.org/officeDocument/2006/relationships" id="2147483660" r:id="R9b325140c8734cec"/>
+    <p:sldMasterId xmlns:r="http://schemas.openxmlformats.org/officeDocument/2006/relationships" id="2147483663" r:id="Ra172fd828fac44b3"/>
   </p:sldMasterIdLst>
   <p:notesMasterIdLst>
-    <p:notesMasterId xmlns:r="http://schemas.openxmlformats.org/officeDocument/2006/relationships" r:id="R6186def02fb34e76"/>
+    <p:notesMasterId xmlns:r="http://schemas.openxmlformats.org/officeDocument/2006/relationships" r:id="R3d8557ec87df4926"/>
   </p:notesMasterIdLst>
   <p:sldIdLst>
-    <p:sldId xmlns:r="http://schemas.openxmlformats.org/officeDocument/2006/relationships" id="256" r:id="R292a00b151414333"/>
-    <p:sldId xmlns:r="http://schemas.openxmlformats.org/officeDocument/2006/relationships" id="257" r:id="R490078a642c74774"/>
-    <p:sldId xmlns:r="http://schemas.openxmlformats.org/officeDocument/2006/relationships" id="258" r:id="R8945d7153140482b"/>
+    <p:sldId xmlns:r="http://schemas.openxmlformats.org/officeDocument/2006/relationships" id="256" r:id="Rdec68eb1bcb54b03"/>
+    <p:sldId xmlns:r="http://schemas.openxmlformats.org/officeDocument/2006/relationships" id="257" r:id="R6c95cbcf53fc487f"/>
+    <p:sldId xmlns:r="http://schemas.openxmlformats.org/officeDocument/2006/relationships" id="258" r:id="R007e20ef4e414e13"/>
   </p:sldIdLst>
   <p:sldSz cx="12192000" cy="6858000"/>
   <p:notesSz cx="6858000" cy="9144000"/>
@@ -637,7 +637,7 @@
           <p:nvPr/>
         </p:nvPicPr>
         <p:blipFill>
-          <a:blip xmlns:r="http://schemas.openxmlformats.org/officeDocument/2006/relationships" xmlns:a="http://schemas.openxmlformats.org/drawingml/2006/main" r:embed="R7bfc4b9f14234ebc">
+          <a:blip xmlns:r="http://schemas.openxmlformats.org/officeDocument/2006/relationships" xmlns:a="http://schemas.openxmlformats.org/drawingml/2006/main" r:embed="R3445f3bd397a4d88">
             <a:alphaModFix amt="20000"/>
             <a:clrChange>
               <a:clrFrom>
@@ -681,7 +681,7 @@
           <p:nvPr/>
         </p:nvPicPr>
         <p:blipFill>
-          <a:blip xmlns:r="http://schemas.openxmlformats.org/officeDocument/2006/relationships" xmlns:a="http://schemas.openxmlformats.org/drawingml/2006/main" r:embed="R40fc8518f9044010"/>
+          <a:blip xmlns:r="http://schemas.openxmlformats.org/officeDocument/2006/relationships" xmlns:a="http://schemas.openxmlformats.org/drawingml/2006/main" r:embed="R9f7af4ad1ae04eb7"/>
           <a:srcRect xmlns:a="http://schemas.openxmlformats.org/drawingml/2006/main" l="0" t="0" r="0" b="60826"/>
           <a:stretch xmlns:a="http://schemas.openxmlformats.org/drawingml/2006/main">
             <a:fillRect l="0" t="0" r="0" b="0"/>
@@ -706,7 +706,7 @@
           <p:nvPr/>
         </p:nvPicPr>
         <p:blipFill>
-          <a:blip xmlns:r="http://schemas.openxmlformats.org/officeDocument/2006/relationships" xmlns:a="http://schemas.openxmlformats.org/drawingml/2006/main" r:embed="Rdc59e8e005ee4cdb"/>
+          <a:blip xmlns:r="http://schemas.openxmlformats.org/officeDocument/2006/relationships" xmlns:a="http://schemas.openxmlformats.org/drawingml/2006/main" r:embed="R9484286d5c5f40c1"/>
           <a:stretch xmlns:a="http://schemas.openxmlformats.org/drawingml/2006/main">
             <a:fillRect l="0" t="0" r="0" b="0"/>
           </a:stretch>
@@ -1131,7 +1131,7 @@
           <p:nvPr/>
         </p:nvPicPr>
         <p:blipFill>
-          <a:blip xmlns:r="http://schemas.openxmlformats.org/officeDocument/2006/relationships" xmlns:a="http://schemas.openxmlformats.org/drawingml/2006/main" r:embed="Rab6988b3d2b5474c"/>
+          <a:blip xmlns:r="http://schemas.openxmlformats.org/officeDocument/2006/relationships" xmlns:a="http://schemas.openxmlformats.org/drawingml/2006/main" r:embed="Rb1004c8e390147c1"/>
           <a:srcRect xmlns:a="http://schemas.openxmlformats.org/drawingml/2006/main" l="0" t="0" r="0" b="14645"/>
           <a:stretch xmlns:a="http://schemas.openxmlformats.org/drawingml/2006/main">
             <a:fillRect l="0" t="0" r="0" b="0"/>
@@ -1472,7 +1472,7 @@
           <p:nvPr/>
         </p:nvPicPr>
         <p:blipFill>
-          <a:blip xmlns:r="http://schemas.openxmlformats.org/officeDocument/2006/relationships" xmlns:a="http://schemas.openxmlformats.org/drawingml/2006/main" r:embed="Red314810242f4cee"/>
+          <a:blip xmlns:r="http://schemas.openxmlformats.org/officeDocument/2006/relationships" xmlns:a="http://schemas.openxmlformats.org/drawingml/2006/main" r:embed="R2953aef8d81c4ec7"/>
           <a:srcRect xmlns:a="http://schemas.openxmlformats.org/drawingml/2006/main" l="0" t="0" r="0" b="14645"/>
           <a:stretch xmlns:a="http://schemas.openxmlformats.org/drawingml/2006/main">
             <a:fillRect l="0" t="0" r="0" b="0"/>
@@ -1912,7 +1912,7 @@
           <p:nvPr/>
         </p:nvPicPr>
         <p:blipFill>
-          <a:blip xmlns:r="http://schemas.openxmlformats.org/officeDocument/2006/relationships" xmlns:a="http://schemas.openxmlformats.org/drawingml/2006/main" r:embed="R5f29f40739784ef4"/>
+          <a:blip xmlns:r="http://schemas.openxmlformats.org/officeDocument/2006/relationships" xmlns:a="http://schemas.openxmlformats.org/drawingml/2006/main" r:embed="Rb7419ed0c46d46c2"/>
           <a:srcRect xmlns:a="http://schemas.openxmlformats.org/drawingml/2006/main" l="0" t="0" r="0" b="59104"/>
           <a:stretch xmlns:a="http://schemas.openxmlformats.org/drawingml/2006/main">
             <a:fillRect l="0" t="0" r="0" b="0"/>
@@ -2242,7 +2242,7 @@
           <p:nvPr/>
         </p:nvPicPr>
         <p:blipFill>
-          <a:blip xmlns:r="http://schemas.openxmlformats.org/officeDocument/2006/relationships" xmlns:a="http://schemas.openxmlformats.org/drawingml/2006/main" r:embed="R15a6b297bd644588">
+          <a:blip xmlns:r="http://schemas.openxmlformats.org/officeDocument/2006/relationships" xmlns:a="http://schemas.openxmlformats.org/drawingml/2006/main" r:embed="Rc3ec029781d8428d">
             <a:alphaModFix amt="70000"/>
           </a:blip>
           <a:srcRect xmlns:a="http://schemas.openxmlformats.org/drawingml/2006/main" l="0" t="0" r="0" b="58808"/>
@@ -3972,17 +3972,17 @@
   </p:cSld>
   <p:clrMap bg1="lt1" tx1="dk1" bg2="lt2" tx2="dk2" accent1="accent1" accent2="accent2" accent3="accent3" accent4="accent4" accent5="accent5" accent6="accent6" hlink="hlink" folHlink="folHlink"/>
   <p:sldLayoutIdLst>
-    <p:sldLayoutId xmlns:r="http://schemas.openxmlformats.org/officeDocument/2006/relationships" id="2147483649" r:id="Rffa07005a9814398"/>
-    <p:sldLayoutId xmlns:r="http://schemas.openxmlformats.org/officeDocument/2006/relationships" id="2147483650" r:id="Rac08475e4e654abb"/>
-    <p:sldLayoutId xmlns:r="http://schemas.openxmlformats.org/officeDocument/2006/relationships" id="2147483651" r:id="Ra2acfdb25f904caf"/>
-    <p:sldLayoutId xmlns:r="http://schemas.openxmlformats.org/officeDocument/2006/relationships" id="2147483652" r:id="Rc264590de9384182"/>
-    <p:sldLayoutId xmlns:r="http://schemas.openxmlformats.org/officeDocument/2006/relationships" id="2147483653" r:id="Rc65b88b4880a4026"/>
-    <p:sldLayoutId xmlns:r="http://schemas.openxmlformats.org/officeDocument/2006/relationships" id="2147483654" r:id="Re65e402135574c9c"/>
-    <p:sldLayoutId xmlns:r="http://schemas.openxmlformats.org/officeDocument/2006/relationships" id="2147483655" r:id="Ra1a7e1269fca4417"/>
-    <p:sldLayoutId xmlns:r="http://schemas.openxmlformats.org/officeDocument/2006/relationships" id="2147483656" r:id="Recc82709b6b94b6a"/>
-    <p:sldLayoutId xmlns:r="http://schemas.openxmlformats.org/officeDocument/2006/relationships" id="2147483657" r:id="R224ae539d2964aeb"/>
-    <p:sldLayoutId xmlns:r="http://schemas.openxmlformats.org/officeDocument/2006/relationships" id="2147483658" r:id="Rbfa39d09203e44ba"/>
-    <p:sldLayoutId xmlns:r="http://schemas.openxmlformats.org/officeDocument/2006/relationships" id="2147483659" r:id="R9f63d4a4fdbc4647"/>
+    <p:sldLayoutId xmlns:r="http://schemas.openxmlformats.org/officeDocument/2006/relationships" id="2147483649" r:id="Rfc44367d96524bb2"/>
+    <p:sldLayoutId xmlns:r="http://schemas.openxmlformats.org/officeDocument/2006/relationships" id="2147483650" r:id="Rcec627bf1af3433e"/>
+    <p:sldLayoutId xmlns:r="http://schemas.openxmlformats.org/officeDocument/2006/relationships" id="2147483651" r:id="R59e76b6d3a5c4bb6"/>
+    <p:sldLayoutId xmlns:r="http://schemas.openxmlformats.org/officeDocument/2006/relationships" id="2147483652" r:id="Rc86e217fec514031"/>
+    <p:sldLayoutId xmlns:r="http://schemas.openxmlformats.org/officeDocument/2006/relationships" id="2147483653" r:id="Rd870e86d27084d0e"/>
+    <p:sldLayoutId xmlns:r="http://schemas.openxmlformats.org/officeDocument/2006/relationships" id="2147483654" r:id="R00b78ef5cf8b4e33"/>
+    <p:sldLayoutId xmlns:r="http://schemas.openxmlformats.org/officeDocument/2006/relationships" id="2147483655" r:id="R12d7c6159a89472b"/>
+    <p:sldLayoutId xmlns:r="http://schemas.openxmlformats.org/officeDocument/2006/relationships" id="2147483656" r:id="R67a1fd1376ff49db"/>
+    <p:sldLayoutId xmlns:r="http://schemas.openxmlformats.org/officeDocument/2006/relationships" id="2147483657" r:id="Rd14e78c014334296"/>
+    <p:sldLayoutId xmlns:r="http://schemas.openxmlformats.org/officeDocument/2006/relationships" id="2147483658" r:id="Re10ddab49015432e"/>
+    <p:sldLayoutId xmlns:r="http://schemas.openxmlformats.org/officeDocument/2006/relationships" id="2147483659" r:id="Rc3bcd6c8f6e94b5d"/>
   </p:sldLayoutIdLst>
   <p:txStyles>
     <p:titleStyle>
@@ -4563,8 +4563,8 @@
   </p:cSld>
   <p:clrMap bg1="lt1" tx1="dk1" bg2="lt2" tx2="dk2" accent1="accent1" accent2="accent2" accent3="accent3" accent4="accent4" accent5="accent5" accent6="accent6" hlink="hlink" folHlink="folHlink"/>
   <p:sldLayoutIdLst>
-    <p:sldLayoutId xmlns:r="http://schemas.openxmlformats.org/officeDocument/2006/relationships" id="2147483661" r:id="R1b1f34386edf4ad2"/>
-    <p:sldLayoutId xmlns:r="http://schemas.openxmlformats.org/officeDocument/2006/relationships" id="2147483662" r:id="R23da1f1145404540"/>
+    <p:sldLayoutId xmlns:r="http://schemas.openxmlformats.org/officeDocument/2006/relationships" id="2147483661" r:id="R7e445c43ab4449b3"/>
+    <p:sldLayoutId xmlns:r="http://schemas.openxmlformats.org/officeDocument/2006/relationships" id="2147483662" r:id="Rfd1136e7c1e0440b"/>
   </p:sldLayoutIdLst>
   <p:txStyles>
     <p:titleStyle>
@@ -5323,8 +5323,8 @@
   </p:cSld>
   <p:clrMap bg1="lt1" tx1="dk1" bg2="lt2" tx2="dk2" accent1="accent1" accent2="accent2" accent3="accent3" accent4="accent4" accent5="accent5" accent6="accent6" hlink="hlink" folHlink="folHlink"/>
   <p:sldLayoutIdLst>
-    <p:sldLayoutId xmlns:r="http://schemas.openxmlformats.org/officeDocument/2006/relationships" id="2147483664" r:id="Rede50b61d2bd46d5"/>
-    <p:sldLayoutId xmlns:r="http://schemas.openxmlformats.org/officeDocument/2006/relationships" id="2147483665" r:id="R7923c90bdb124e52"/>
+    <p:sldLayoutId xmlns:r="http://schemas.openxmlformats.org/officeDocument/2006/relationships" id="2147483664" r:id="R7690ad2dce41405f"/>
+    <p:sldLayoutId xmlns:r="http://schemas.openxmlformats.org/officeDocument/2006/relationships" id="2147483665" r:id="R401e4e7ddaaf4deb"/>
   </p:sldLayoutIdLst>
   <p:txStyles>
     <p:titleStyle>
@@ -6841,7 +6841,7 @@
           <p:nvPr/>
         </p:nvPicPr>
         <p:blipFill>
-          <a:blip xmlns:r="http://schemas.openxmlformats.org/officeDocument/2006/relationships" xmlns:a="http://schemas.openxmlformats.org/drawingml/2006/main" r:embed="Rd3af550771094ebc"/>
+          <a:blip xmlns:r="http://schemas.openxmlformats.org/officeDocument/2006/relationships" xmlns:a="http://schemas.openxmlformats.org/drawingml/2006/main" r:embed="Rb4f1ba2427104cde"/>
           <a:stretch xmlns:a="http://schemas.openxmlformats.org/drawingml/2006/main">
             <a:fillRect l="0" t="0" r="0" b="0"/>
           </a:stretch>
@@ -7198,7 +7198,7 @@
           <p:nvPr/>
         </p:nvPicPr>
         <p:blipFill>
-          <a:blip xmlns:r="http://schemas.openxmlformats.org/officeDocument/2006/relationships" xmlns:a="http://schemas.openxmlformats.org/drawingml/2006/main" r:embed="R1bcb16cec6e24634"/>
+          <a:blip xmlns:r="http://schemas.openxmlformats.org/officeDocument/2006/relationships" xmlns:a="http://schemas.openxmlformats.org/drawingml/2006/main" r:embed="R906d43cfc0d643bb"/>
           <a:stretch xmlns:a="http://schemas.openxmlformats.org/drawingml/2006/main">
             <a:fillRect l="0" t="0" r="0" b="0"/>
           </a:stretch>
@@ -7555,7 +7555,7 @@
           <p:nvPr/>
         </p:nvPicPr>
         <p:blipFill>
-          <a:blip xmlns:r="http://schemas.openxmlformats.org/officeDocument/2006/relationships" xmlns:a="http://schemas.openxmlformats.org/drawingml/2006/main" r:embed="R93fb5c79538f46ea"/>
+          <a:blip xmlns:r="http://schemas.openxmlformats.org/officeDocument/2006/relationships" xmlns:a="http://schemas.openxmlformats.org/drawingml/2006/main" r:embed="Rb966e61783f24ab4"/>
           <a:stretch xmlns:a="http://schemas.openxmlformats.org/drawingml/2006/main">
             <a:fillRect l="0" t="0" r="0" b="0"/>
           </a:stretch>
